--- a/skills/pptx-deck/examples/sample_output.pptx
+++ b/skills/pptx-deck/examples/sample_output.pptx
@@ -3482,6 +3482,90 @@
           </a:p>
         </p:txBody>
       </p:sp>
+      <p:sp>
+        <p:nvSpPr>
+          <p:cNvPr id="9" name="Rectangle 8"/>
+          <p:cNvSpPr/>
+          <p:nvPr/>
+        </p:nvSpPr>
+        <p:spPr>
+          <a:xfrm>
+            <a:off x="502920" y="6400800"/>
+            <a:ext cx="11185855" cy="6350"/>
+          </a:xfrm>
+          <a:prstGeom prst="rect">
+            <a:avLst/>
+          </a:prstGeom>
+          <a:solidFill>
+            <a:srgbClr val="D9D9D9"/>
+          </a:solidFill>
+          <a:ln>
+            <a:noFill/>
+          </a:ln>
+        </p:spPr>
+        <p:style>
+          <a:lnRef idx="1">
+            <a:schemeClr val="accent1"/>
+          </a:lnRef>
+          <a:fillRef idx="3">
+            <a:schemeClr val="accent1"/>
+          </a:fillRef>
+          <a:effectRef idx="2">
+            <a:schemeClr val="accent1"/>
+          </a:effectRef>
+          <a:fontRef idx="minor">
+            <a:schemeClr val="lt1"/>
+          </a:fontRef>
+        </p:style>
+        <p:txBody>
+          <a:bodyPr rtlCol="0" anchor="ctr"/>
+          <a:lstStyle/>
+          <a:p>
+            <a:pPr algn="ctr"/>
+          </a:p>
+        </p:txBody>
+      </p:sp>
+      <p:sp>
+        <p:nvSpPr>
+          <p:cNvPr id="10" name="TextBox 9"/>
+          <p:cNvSpPr txBox="1"/>
+          <p:nvPr/>
+        </p:nvSpPr>
+        <p:spPr>
+          <a:xfrm>
+            <a:off x="9859975" y="6492240"/>
+            <a:ext cx="1828800" cy="274320"/>
+          </a:xfrm>
+          <a:prstGeom prst="rect">
+            <a:avLst/>
+          </a:prstGeom>
+          <a:noFill/>
+        </p:spPr>
+        <p:txBody>
+          <a:bodyPr wrap="none" lIns="0" rIns="0" tIns="0" bIns="0">
+            <a:spAutoFit/>
+          </a:bodyPr>
+          <a:lstStyle/>
+          <a:p>
+            <a:pPr algn="r">
+              <a:lnSpc>
+                <a:spcPct val="100000"/>
+              </a:lnSpc>
+            </a:pPr>
+            <a:r>
+              <a:rPr sz="900" b="0" i="0">
+                <a:solidFill>
+                  <a:srgbClr val="8C8C8C"/>
+                </a:solidFill>
+                <a:latin typeface="Helvetica Neue"/>
+                <a:ea typeface="Helvetica Neue"/>
+                <a:cs typeface="Helvetica Neue"/>
+              </a:rPr>
+              <a:t>1 / 5</a:t>
+            </a:r>
+          </a:p>
+        </p:txBody>
+      </p:sp>
     </p:spTree>
   </p:cSld>
   <p:clrMapOvr>
@@ -3781,6 +3865,90 @@
           </a:p>
         </p:txBody>
       </p:sp>
+      <p:sp>
+        <p:nvSpPr>
+          <p:cNvPr id="4" name="Rectangle 3"/>
+          <p:cNvSpPr/>
+          <p:nvPr/>
+        </p:nvSpPr>
+        <p:spPr>
+          <a:xfrm>
+            <a:off x="502920" y="6400800"/>
+            <a:ext cx="11185855" cy="6350"/>
+          </a:xfrm>
+          <a:prstGeom prst="rect">
+            <a:avLst/>
+          </a:prstGeom>
+          <a:solidFill>
+            <a:srgbClr val="D9D9D9"/>
+          </a:solidFill>
+          <a:ln>
+            <a:noFill/>
+          </a:ln>
+        </p:spPr>
+        <p:style>
+          <a:lnRef idx="1">
+            <a:schemeClr val="accent1"/>
+          </a:lnRef>
+          <a:fillRef idx="3">
+            <a:schemeClr val="accent1"/>
+          </a:fillRef>
+          <a:effectRef idx="2">
+            <a:schemeClr val="accent1"/>
+          </a:effectRef>
+          <a:fontRef idx="minor">
+            <a:schemeClr val="lt1"/>
+          </a:fontRef>
+        </p:style>
+        <p:txBody>
+          <a:bodyPr rtlCol="0" anchor="ctr"/>
+          <a:lstStyle/>
+          <a:p>
+            <a:pPr algn="ctr"/>
+          </a:p>
+        </p:txBody>
+      </p:sp>
+      <p:sp>
+        <p:nvSpPr>
+          <p:cNvPr id="5" name="TextBox 4"/>
+          <p:cNvSpPr txBox="1"/>
+          <p:nvPr/>
+        </p:nvSpPr>
+        <p:spPr>
+          <a:xfrm>
+            <a:off x="9859975" y="6492240"/>
+            <a:ext cx="1828800" cy="274320"/>
+          </a:xfrm>
+          <a:prstGeom prst="rect">
+            <a:avLst/>
+          </a:prstGeom>
+          <a:noFill/>
+        </p:spPr>
+        <p:txBody>
+          <a:bodyPr wrap="none" lIns="0" rIns="0" tIns="0" bIns="0">
+            <a:spAutoFit/>
+          </a:bodyPr>
+          <a:lstStyle/>
+          <a:p>
+            <a:pPr algn="r">
+              <a:lnSpc>
+                <a:spcPct val="100000"/>
+              </a:lnSpc>
+            </a:pPr>
+            <a:r>
+              <a:rPr sz="900" b="0" i="0">
+                <a:solidFill>
+                  <a:srgbClr val="8C8C8C"/>
+                </a:solidFill>
+                <a:latin typeface="Helvetica Neue"/>
+                <a:ea typeface="Helvetica Neue"/>
+                <a:cs typeface="Helvetica Neue"/>
+              </a:rPr>
+              <a:t>2 / 5</a:t>
+            </a:r>
+          </a:p>
+        </p:txBody>
+      </p:sp>
     </p:spTree>
   </p:cSld>
   <p:clrMapOvr>
@@ -4333,6 +4501,90 @@
           </a:p>
         </p:txBody>
       </p:sp>
+      <p:sp>
+        <p:nvSpPr>
+          <p:cNvPr id="15" name="Rectangle 14"/>
+          <p:cNvSpPr/>
+          <p:nvPr/>
+        </p:nvSpPr>
+        <p:spPr>
+          <a:xfrm>
+            <a:off x="502920" y="6400800"/>
+            <a:ext cx="11185855" cy="6350"/>
+          </a:xfrm>
+          <a:prstGeom prst="rect">
+            <a:avLst/>
+          </a:prstGeom>
+          <a:solidFill>
+            <a:srgbClr val="D9D9D9"/>
+          </a:solidFill>
+          <a:ln>
+            <a:noFill/>
+          </a:ln>
+        </p:spPr>
+        <p:style>
+          <a:lnRef idx="1">
+            <a:schemeClr val="accent1"/>
+          </a:lnRef>
+          <a:fillRef idx="3">
+            <a:schemeClr val="accent1"/>
+          </a:fillRef>
+          <a:effectRef idx="2">
+            <a:schemeClr val="accent1"/>
+          </a:effectRef>
+          <a:fontRef idx="minor">
+            <a:schemeClr val="lt1"/>
+          </a:fontRef>
+        </p:style>
+        <p:txBody>
+          <a:bodyPr rtlCol="0" anchor="ctr"/>
+          <a:lstStyle/>
+          <a:p>
+            <a:pPr algn="ctr"/>
+          </a:p>
+        </p:txBody>
+      </p:sp>
+      <p:sp>
+        <p:nvSpPr>
+          <p:cNvPr id="16" name="TextBox 15"/>
+          <p:cNvSpPr txBox="1"/>
+          <p:nvPr/>
+        </p:nvSpPr>
+        <p:spPr>
+          <a:xfrm>
+            <a:off x="9859975" y="6492240"/>
+            <a:ext cx="1828800" cy="274320"/>
+          </a:xfrm>
+          <a:prstGeom prst="rect">
+            <a:avLst/>
+          </a:prstGeom>
+          <a:noFill/>
+        </p:spPr>
+        <p:txBody>
+          <a:bodyPr wrap="none" lIns="0" rIns="0" tIns="0" bIns="0">
+            <a:spAutoFit/>
+          </a:bodyPr>
+          <a:lstStyle/>
+          <a:p>
+            <a:pPr algn="r">
+              <a:lnSpc>
+                <a:spcPct val="100000"/>
+              </a:lnSpc>
+            </a:pPr>
+            <a:r>
+              <a:rPr sz="900" b="0" i="0">
+                <a:solidFill>
+                  <a:srgbClr val="8C8C8C"/>
+                </a:solidFill>
+                <a:latin typeface="Helvetica Neue"/>
+                <a:ea typeface="Helvetica Neue"/>
+                <a:cs typeface="Helvetica Neue"/>
+              </a:rPr>
+              <a:t>3 / 5</a:t>
+            </a:r>
+          </a:p>
+        </p:txBody>
+      </p:sp>
     </p:spTree>
   </p:cSld>
   <p:clrMapOvr>
@@ -4719,6 +4971,90 @@
           </a:p>
         </p:txBody>
       </p:sp>
+      <p:sp>
+        <p:nvSpPr>
+          <p:cNvPr id="11" name="Rectangle 10"/>
+          <p:cNvSpPr/>
+          <p:nvPr/>
+        </p:nvSpPr>
+        <p:spPr>
+          <a:xfrm>
+            <a:off x="502920" y="6400800"/>
+            <a:ext cx="11185855" cy="6350"/>
+          </a:xfrm>
+          <a:prstGeom prst="rect">
+            <a:avLst/>
+          </a:prstGeom>
+          <a:solidFill>
+            <a:srgbClr val="D9D9D9"/>
+          </a:solidFill>
+          <a:ln>
+            <a:noFill/>
+          </a:ln>
+        </p:spPr>
+        <p:style>
+          <a:lnRef idx="1">
+            <a:schemeClr val="accent1"/>
+          </a:lnRef>
+          <a:fillRef idx="3">
+            <a:schemeClr val="accent1"/>
+          </a:fillRef>
+          <a:effectRef idx="2">
+            <a:schemeClr val="accent1"/>
+          </a:effectRef>
+          <a:fontRef idx="minor">
+            <a:schemeClr val="lt1"/>
+          </a:fontRef>
+        </p:style>
+        <p:txBody>
+          <a:bodyPr rtlCol="0" anchor="ctr"/>
+          <a:lstStyle/>
+          <a:p>
+            <a:pPr algn="ctr"/>
+          </a:p>
+        </p:txBody>
+      </p:sp>
+      <p:sp>
+        <p:nvSpPr>
+          <p:cNvPr id="12" name="TextBox 11"/>
+          <p:cNvSpPr txBox="1"/>
+          <p:nvPr/>
+        </p:nvSpPr>
+        <p:spPr>
+          <a:xfrm>
+            <a:off x="9859975" y="6492240"/>
+            <a:ext cx="1828800" cy="274320"/>
+          </a:xfrm>
+          <a:prstGeom prst="rect">
+            <a:avLst/>
+          </a:prstGeom>
+          <a:noFill/>
+        </p:spPr>
+        <p:txBody>
+          <a:bodyPr wrap="none" lIns="0" rIns="0" tIns="0" bIns="0">
+            <a:spAutoFit/>
+          </a:bodyPr>
+          <a:lstStyle/>
+          <a:p>
+            <a:pPr algn="r">
+              <a:lnSpc>
+                <a:spcPct val="100000"/>
+              </a:lnSpc>
+            </a:pPr>
+            <a:r>
+              <a:rPr sz="900" b="0" i="0">
+                <a:solidFill>
+                  <a:srgbClr val="8C8C8C"/>
+                </a:solidFill>
+                <a:latin typeface="Helvetica Neue"/>
+                <a:ea typeface="Helvetica Neue"/>
+                <a:cs typeface="Helvetica Neue"/>
+              </a:rPr>
+              <a:t>4 / 5</a:t>
+            </a:r>
+          </a:p>
+        </p:txBody>
+      </p:sp>
     </p:spTree>
   </p:cSld>
   <p:clrMapOvr>
@@ -5117,6 +5453,90 @@
                 <a:cs typeface="Microsoft YaHei"/>
               </a:rPr>
               <a:t>质量可回归</a:t>
+            </a:r>
+          </a:p>
+        </p:txBody>
+      </p:sp>
+      <p:sp>
+        <p:nvSpPr>
+          <p:cNvPr id="12" name="Rectangle 11"/>
+          <p:cNvSpPr/>
+          <p:nvPr/>
+        </p:nvSpPr>
+        <p:spPr>
+          <a:xfrm>
+            <a:off x="502920" y="6400800"/>
+            <a:ext cx="11185855" cy="6350"/>
+          </a:xfrm>
+          <a:prstGeom prst="rect">
+            <a:avLst/>
+          </a:prstGeom>
+          <a:solidFill>
+            <a:srgbClr val="D9D9D9"/>
+          </a:solidFill>
+          <a:ln>
+            <a:noFill/>
+          </a:ln>
+        </p:spPr>
+        <p:style>
+          <a:lnRef idx="1">
+            <a:schemeClr val="accent1"/>
+          </a:lnRef>
+          <a:fillRef idx="3">
+            <a:schemeClr val="accent1"/>
+          </a:fillRef>
+          <a:effectRef idx="2">
+            <a:schemeClr val="accent1"/>
+          </a:effectRef>
+          <a:fontRef idx="minor">
+            <a:schemeClr val="lt1"/>
+          </a:fontRef>
+        </p:style>
+        <p:txBody>
+          <a:bodyPr rtlCol="0" anchor="ctr"/>
+          <a:lstStyle/>
+          <a:p>
+            <a:pPr algn="ctr"/>
+          </a:p>
+        </p:txBody>
+      </p:sp>
+      <p:sp>
+        <p:nvSpPr>
+          <p:cNvPr id="13" name="TextBox 12"/>
+          <p:cNvSpPr txBox="1"/>
+          <p:nvPr/>
+        </p:nvSpPr>
+        <p:spPr>
+          <a:xfrm>
+            <a:off x="9859975" y="6492240"/>
+            <a:ext cx="1828800" cy="274320"/>
+          </a:xfrm>
+          <a:prstGeom prst="rect">
+            <a:avLst/>
+          </a:prstGeom>
+          <a:noFill/>
+        </p:spPr>
+        <p:txBody>
+          <a:bodyPr wrap="none" lIns="0" rIns="0" tIns="0" bIns="0">
+            <a:spAutoFit/>
+          </a:bodyPr>
+          <a:lstStyle/>
+          <a:p>
+            <a:pPr algn="r">
+              <a:lnSpc>
+                <a:spcPct val="100000"/>
+              </a:lnSpc>
+            </a:pPr>
+            <a:r>
+              <a:rPr sz="900" b="0" i="0">
+                <a:solidFill>
+                  <a:srgbClr val="8C8C8C"/>
+                </a:solidFill>
+                <a:latin typeface="Helvetica Neue"/>
+                <a:ea typeface="Helvetica Neue"/>
+                <a:cs typeface="Helvetica Neue"/>
+              </a:rPr>
+              <a:t>5 / 5</a:t>
             </a:r>
           </a:p>
         </p:txBody>
